--- a/output/broll_003.pptx
+++ b/output/broll_003.pptx
@@ -3111,7 +3111,7 @@
             <a:avLst/>
           </a:prstGeom>
           <a:solidFill>
-            <a:srgbClr val="FF6B6B"/>
+            <a:srgbClr val="00D9A6"/>
           </a:solidFill>
           <a:ln>
             <a:noFill/>
@@ -3169,7 +3169,7 @@
                 </a:solidFill>
                 <a:latin typeface="Calibri"/>
               </a:rPr>
-              <a:t>Remote Access and Communication</a:t>
+              <a:t>Remote Access Options</a:t>
             </a:r>
           </a:p>
         </p:txBody>
@@ -3182,19 +3182,17 @@
         </p:nvSpPr>
         <p:spPr>
           <a:xfrm>
-            <a:off x="365760" y="1097280"/>
-            <a:ext cx="3840480" cy="3200400"/>
+            <a:off x="2926080" y="1097280"/>
+            <a:ext cx="3291840" cy="914400"/>
           </a:xfrm>
           <a:prstGeom prst="rect">
             <a:avLst/>
           </a:prstGeom>
           <a:solidFill>
-            <a:srgbClr val="2A1010"/>
+            <a:srgbClr val="6C63FF"/>
           </a:solidFill>
-          <a:ln w="19050">
-            <a:solidFill>
-              <a:srgbClr val="FF6B6B"/>
-            </a:solidFill>
+          <a:ln>
+            <a:noFill/>
           </a:ln>
         </p:spPr>
         <p:style>
@@ -3227,8 +3225,8 @@
         </p:nvSpPr>
         <p:spPr>
           <a:xfrm>
-            <a:off x="502920" y="1188720"/>
-            <a:ext cx="3657600" cy="457200"/>
+            <a:off x="2926080" y="1097280"/>
+            <a:ext cx="3291840" cy="914400"/>
           </a:xfrm>
           <a:prstGeom prst="rect">
             <a:avLst/>
@@ -3241,110 +3239,38 @@
           </a:bodyPr>
           <a:lstStyle/>
           <a:p>
-            <a:pPr algn="l"/>
-            <a:r>
-              <a:rPr sz="1300" b="1">
-                <a:solidFill>
-                  <a:srgbClr val="FF6B6B"/>
-                </a:solidFill>
-                <a:latin typeface="Calibri"/>
-              </a:rPr>
-              <a:t>⚠ PROBLEM</a:t>
-            </a:r>
-          </a:p>
-        </p:txBody>
-      </p:sp>
-      <p:sp>
-        <p:nvSpPr>
-          <p:cNvPr id="6" name="TextBox 5"/>
-          <p:cNvSpPr txBox="1"/>
-          <p:nvPr/>
-        </p:nvSpPr>
-        <p:spPr>
-          <a:xfrm>
-            <a:off x="502920" y="1691640"/>
-            <a:ext cx="3566160" cy="2286000"/>
-          </a:xfrm>
-          <a:prstGeom prst="rect">
-            <a:avLst/>
-          </a:prstGeom>
-          <a:noFill/>
-        </p:spPr>
-        <p:txBody>
-          <a:bodyPr wrap="square">
-            <a:spAutoFit/>
-          </a:bodyPr>
-          <a:lstStyle/>
-          <a:p>
-            <a:pPr algn="l"/>
-            <a:r>
-              <a:rPr sz="1800" b="0">
+            <a:pPr algn="ctr"/>
+            <a:r>
+              <a:rPr sz="1600" b="1">
                 <a:solidFill>
                   <a:srgbClr val="FFFFFF"/>
                 </a:solidFill>
                 <a:latin typeface="Calibri"/>
               </a:rPr>
-              <a:t>Remote access and communication between regions or data centers are vulnerable to security threats.</a:t>
-            </a:r>
-          </a:p>
-        </p:txBody>
-      </p:sp>
-      <p:sp>
-        <p:nvSpPr>
-          <p:cNvPr id="7" name="TextBox 6"/>
-          <p:cNvSpPr txBox="1"/>
+              <a:t>Do you need secure remote access?</a:t>
+            </a:r>
+          </a:p>
+        </p:txBody>
+      </p:sp>
+      <p:sp>
+        <p:nvSpPr>
+          <p:cNvPr id="6" name="Rectangle 5"/>
+          <p:cNvSpPr/>
           <p:nvPr/>
         </p:nvSpPr>
         <p:spPr>
           <a:xfrm>
-            <a:off x="4343400" y="2286000"/>
-            <a:ext cx="548640" cy="731520"/>
-          </a:xfrm>
-          <a:prstGeom prst="rect">
-            <a:avLst/>
-          </a:prstGeom>
-          <a:noFill/>
-        </p:spPr>
-        <p:txBody>
-          <a:bodyPr wrap="square">
-            <a:spAutoFit/>
-          </a:bodyPr>
-          <a:lstStyle/>
-          <a:p>
-            <a:pPr algn="ctr"/>
-            <a:r>
-              <a:rPr sz="3600" b="1">
-                <a:solidFill>
-                  <a:srgbClr val="00D9A6"/>
-                </a:solidFill>
-                <a:latin typeface="Calibri"/>
-              </a:rPr>
-              <a:t>→</a:t>
-            </a:r>
-          </a:p>
-        </p:txBody>
-      </p:sp>
-      <p:sp>
-        <p:nvSpPr>
-          <p:cNvPr id="8" name="Rectangle 7"/>
-          <p:cNvSpPr/>
-          <p:nvPr/>
-        </p:nvSpPr>
-        <p:spPr>
-          <a:xfrm>
-            <a:off x="4937760" y="1097280"/>
-            <a:ext cx="3840480" cy="3200400"/>
+            <a:off x="731520" y="3017520"/>
+            <a:ext cx="3200400" cy="822960"/>
           </a:xfrm>
           <a:prstGeom prst="rect">
             <a:avLst/>
           </a:prstGeom>
           <a:solidFill>
-            <a:srgbClr val="0A2A1A"/>
+            <a:srgbClr val="E57373"/>
           </a:solidFill>
-          <a:ln w="19050">
-            <a:solidFill>
-              <a:srgbClr val="00D9A6"/>
-            </a:solidFill>
+          <a:ln>
+            <a:noFill/>
           </a:ln>
         </p:spPr>
         <p:style>
@@ -3371,14 +3297,14 @@
       </p:sp>
       <p:sp>
         <p:nvSpPr>
-          <p:cNvPr id="9" name="TextBox 8"/>
+          <p:cNvPr id="7" name="TextBox 6"/>
           <p:cNvSpPr txBox="1"/>
           <p:nvPr/>
         </p:nvSpPr>
         <p:spPr>
           <a:xfrm>
-            <a:off x="5074920" y="1188720"/>
-            <a:ext cx="3657600" cy="457200"/>
+            <a:off x="731520" y="3017520"/>
+            <a:ext cx="3200400" cy="822960"/>
           </a:xfrm>
           <a:prstGeom prst="rect">
             <a:avLst/>
@@ -3391,29 +3317,29 @@
           </a:bodyPr>
           <a:lstStyle/>
           <a:p>
-            <a:pPr algn="l"/>
-            <a:r>
-              <a:rPr sz="1300" b="1">
+            <a:pPr algn="ctr"/>
+            <a:r>
+              <a:rPr sz="1500" b="0">
                 <a:solidFill>
-                  <a:srgbClr val="00D9A6"/>
+                  <a:srgbClr val="FFFFFF"/>
                 </a:solidFill>
                 <a:latin typeface="Calibri"/>
               </a:rPr>
-              <a:t>✓ SOLUTION</a:t>
-            </a:r>
-          </a:p>
-        </p:txBody>
-      </p:sp>
-      <p:sp>
-        <p:nvSpPr>
-          <p:cNvPr id="10" name="TextBox 9"/>
+              <a:t>YES  →  Use VPN</a:t>
+            </a:r>
+          </a:p>
+        </p:txBody>
+      </p:sp>
+      <p:sp>
+        <p:nvSpPr>
+          <p:cNvPr id="8" name="TextBox 7"/>
           <p:cNvSpPr txBox="1"/>
           <p:nvPr/>
         </p:nvSpPr>
         <p:spPr>
           <a:xfrm>
-            <a:off x="5074920" y="1691640"/>
-            <a:ext cx="3566160" cy="2286000"/>
+            <a:off x="1645920" y="2331720"/>
+            <a:ext cx="914400" cy="365760"/>
           </a:xfrm>
           <a:prstGeom prst="rect">
             <a:avLst/>
@@ -3426,15 +3352,93 @@
           </a:bodyPr>
           <a:lstStyle/>
           <a:p>
-            <a:pPr algn="l"/>
-            <a:r>
-              <a:rPr sz="1800" b="0">
+            <a:pPr algn="ctr"/>
+            <a:r>
+              <a:rPr sz="1200" b="1">
+                <a:solidFill>
+                  <a:srgbClr val="E57373"/>
+                </a:solidFill>
+                <a:latin typeface="Calibri"/>
+              </a:rPr>
+              <a:t>YES</a:t>
+            </a:r>
+          </a:p>
+        </p:txBody>
+      </p:sp>
+      <p:sp>
+        <p:nvSpPr>
+          <p:cNvPr id="9" name="Rectangle 8"/>
+          <p:cNvSpPr/>
+          <p:nvPr/>
+        </p:nvSpPr>
+        <p:spPr>
+          <a:xfrm>
+            <a:off x="5212080" y="3017520"/>
+            <a:ext cx="3200400" cy="822960"/>
+          </a:xfrm>
+          <a:prstGeom prst="rect">
+            <a:avLst/>
+          </a:prstGeom>
+          <a:solidFill>
+            <a:srgbClr val="00D9A6"/>
+          </a:solidFill>
+          <a:ln>
+            <a:noFill/>
+          </a:ln>
+        </p:spPr>
+        <p:style>
+          <a:lnRef idx="1">
+            <a:schemeClr val="accent1"/>
+          </a:lnRef>
+          <a:fillRef idx="3">
+            <a:schemeClr val="accent1"/>
+          </a:fillRef>
+          <a:effectRef idx="2">
+            <a:schemeClr val="accent1"/>
+          </a:effectRef>
+          <a:fontRef idx="minor">
+            <a:schemeClr val="lt1"/>
+          </a:fontRef>
+        </p:style>
+        <p:txBody>
+          <a:bodyPr rtlCol="0" anchor="ctr"/>
+          <a:lstStyle/>
+          <a:p>
+            <a:pPr algn="ctr"/>
+          </a:p>
+        </p:txBody>
+      </p:sp>
+      <p:sp>
+        <p:nvSpPr>
+          <p:cNvPr id="10" name="TextBox 9"/>
+          <p:cNvSpPr txBox="1"/>
+          <p:nvPr/>
+        </p:nvSpPr>
+        <p:spPr>
+          <a:xfrm>
+            <a:off x="5212080" y="3017520"/>
+            <a:ext cx="3200400" cy="822960"/>
+          </a:xfrm>
+          <a:prstGeom prst="rect">
+            <a:avLst/>
+          </a:prstGeom>
+          <a:noFill/>
+        </p:spPr>
+        <p:txBody>
+          <a:bodyPr wrap="square">
+            <a:spAutoFit/>
+          </a:bodyPr>
+          <a:lstStyle/>
+          <a:p>
+            <a:pPr algn="ctr"/>
+            <a:r>
+              <a:rPr sz="1500" b="0">
                 <a:solidFill>
                   <a:srgbClr val="FFFFFF"/>
                 </a:solidFill>
                 <a:latin typeface="Calibri"/>
               </a:rPr>
-              <a:t>VPNs and private connections provide secure remote access and communication between regions or data centers.</a:t>
+              <a:t>NO  →  Use Private Connections</a:t>
             </a:r>
           </a:p>
         </p:txBody>
@@ -3442,6 +3446,213 @@
       <p:sp>
         <p:nvSpPr>
           <p:cNvPr id="11" name="TextBox 10"/>
+          <p:cNvSpPr txBox="1"/>
+          <p:nvPr/>
+        </p:nvSpPr>
+        <p:spPr>
+          <a:xfrm>
+            <a:off x="6583680" y="2331720"/>
+            <a:ext cx="914400" cy="365760"/>
+          </a:xfrm>
+          <a:prstGeom prst="rect">
+            <a:avLst/>
+          </a:prstGeom>
+          <a:noFill/>
+        </p:spPr>
+        <p:txBody>
+          <a:bodyPr wrap="square">
+            <a:spAutoFit/>
+          </a:bodyPr>
+          <a:lstStyle/>
+          <a:p>
+            <a:pPr algn="ctr"/>
+            <a:r>
+              <a:rPr sz="1200" b="1">
+                <a:solidFill>
+                  <a:srgbClr val="00D9A6"/>
+                </a:solidFill>
+                <a:latin typeface="Calibri"/>
+              </a:rPr>
+              <a:t>NO</a:t>
+            </a:r>
+          </a:p>
+        </p:txBody>
+      </p:sp>
+      <p:sp>
+        <p:nvSpPr>
+          <p:cNvPr id="12" name="Rectangle 11"/>
+          <p:cNvSpPr/>
+          <p:nvPr/>
+        </p:nvSpPr>
+        <p:spPr>
+          <a:xfrm>
+            <a:off x="4553712" y="2011680"/>
+            <a:ext cx="36576" cy="594360"/>
+          </a:xfrm>
+          <a:prstGeom prst="rect">
+            <a:avLst/>
+          </a:prstGeom>
+          <a:solidFill>
+            <a:srgbClr val="B0AED8"/>
+          </a:solidFill>
+          <a:ln>
+            <a:noFill/>
+          </a:ln>
+        </p:spPr>
+        <p:style>
+          <a:lnRef idx="1">
+            <a:schemeClr val="accent1"/>
+          </a:lnRef>
+          <a:fillRef idx="3">
+            <a:schemeClr val="accent1"/>
+          </a:fillRef>
+          <a:effectRef idx="2">
+            <a:schemeClr val="accent1"/>
+          </a:effectRef>
+          <a:fontRef idx="minor">
+            <a:schemeClr val="lt1"/>
+          </a:fontRef>
+        </p:style>
+        <p:txBody>
+          <a:bodyPr rtlCol="0" anchor="ctr"/>
+          <a:lstStyle/>
+          <a:p>
+            <a:pPr algn="ctr"/>
+          </a:p>
+        </p:txBody>
+      </p:sp>
+      <p:sp>
+        <p:nvSpPr>
+          <p:cNvPr id="13" name="Rectangle 12"/>
+          <p:cNvSpPr/>
+          <p:nvPr/>
+        </p:nvSpPr>
+        <p:spPr>
+          <a:xfrm>
+            <a:off x="2331720" y="2578608"/>
+            <a:ext cx="4480560" cy="36576"/>
+          </a:xfrm>
+          <a:prstGeom prst="rect">
+            <a:avLst/>
+          </a:prstGeom>
+          <a:solidFill>
+            <a:srgbClr val="B0AED8"/>
+          </a:solidFill>
+          <a:ln>
+            <a:noFill/>
+          </a:ln>
+        </p:spPr>
+        <p:style>
+          <a:lnRef idx="1">
+            <a:schemeClr val="accent1"/>
+          </a:lnRef>
+          <a:fillRef idx="3">
+            <a:schemeClr val="accent1"/>
+          </a:fillRef>
+          <a:effectRef idx="2">
+            <a:schemeClr val="accent1"/>
+          </a:effectRef>
+          <a:fontRef idx="minor">
+            <a:schemeClr val="lt1"/>
+          </a:fontRef>
+        </p:style>
+        <p:txBody>
+          <a:bodyPr rtlCol="0" anchor="ctr"/>
+          <a:lstStyle/>
+          <a:p>
+            <a:pPr algn="ctr"/>
+          </a:p>
+        </p:txBody>
+      </p:sp>
+      <p:sp>
+        <p:nvSpPr>
+          <p:cNvPr id="14" name="Rectangle 13"/>
+          <p:cNvSpPr/>
+          <p:nvPr/>
+        </p:nvSpPr>
+        <p:spPr>
+          <a:xfrm>
+            <a:off x="2331720" y="2578608"/>
+            <a:ext cx="36576" cy="457200"/>
+          </a:xfrm>
+          <a:prstGeom prst="rect">
+            <a:avLst/>
+          </a:prstGeom>
+          <a:solidFill>
+            <a:srgbClr val="B0AED8"/>
+          </a:solidFill>
+          <a:ln>
+            <a:noFill/>
+          </a:ln>
+        </p:spPr>
+        <p:style>
+          <a:lnRef idx="1">
+            <a:schemeClr val="accent1"/>
+          </a:lnRef>
+          <a:fillRef idx="3">
+            <a:schemeClr val="accent1"/>
+          </a:fillRef>
+          <a:effectRef idx="2">
+            <a:schemeClr val="accent1"/>
+          </a:effectRef>
+          <a:fontRef idx="minor">
+            <a:schemeClr val="lt1"/>
+          </a:fontRef>
+        </p:style>
+        <p:txBody>
+          <a:bodyPr rtlCol="0" anchor="ctr"/>
+          <a:lstStyle/>
+          <a:p>
+            <a:pPr algn="ctr"/>
+          </a:p>
+        </p:txBody>
+      </p:sp>
+      <p:sp>
+        <p:nvSpPr>
+          <p:cNvPr id="15" name="Rectangle 14"/>
+          <p:cNvSpPr/>
+          <p:nvPr/>
+        </p:nvSpPr>
+        <p:spPr>
+          <a:xfrm>
+            <a:off x="6775704" y="2578608"/>
+            <a:ext cx="36576" cy="457200"/>
+          </a:xfrm>
+          <a:prstGeom prst="rect">
+            <a:avLst/>
+          </a:prstGeom>
+          <a:solidFill>
+            <a:srgbClr val="B0AED8"/>
+          </a:solidFill>
+          <a:ln>
+            <a:noFill/>
+          </a:ln>
+        </p:spPr>
+        <p:style>
+          <a:lnRef idx="1">
+            <a:schemeClr val="accent1"/>
+          </a:lnRef>
+          <a:fillRef idx="3">
+            <a:schemeClr val="accent1"/>
+          </a:fillRef>
+          <a:effectRef idx="2">
+            <a:schemeClr val="accent1"/>
+          </a:effectRef>
+          <a:fontRef idx="minor">
+            <a:schemeClr val="lt1"/>
+          </a:fontRef>
+        </p:style>
+        <p:txBody>
+          <a:bodyPr rtlCol="0" anchor="ctr"/>
+          <a:lstStyle/>
+          <a:p>
+            <a:pPr algn="ctr"/>
+          </a:p>
+        </p:txBody>
+      </p:sp>
+      <p:sp>
+        <p:nvSpPr>
+          <p:cNvPr id="16" name="TextBox 15"/>
           <p:cNvSpPr txBox="1"/>
           <p:nvPr/>
         </p:nvSpPr>
